--- a/slides/Week6.pptx
+++ b/slides/Week6.pptx
@@ -1,6 +1,6 @@
 
 <file path=ppt/presentation.xml><?xml version="1.0" encoding="utf-8"?>
-<p:presentation xmlns:a="http://schemas.openxmlformats.org/drawingml/2006/main" xmlns:r="http://schemas.openxmlformats.org/officeDocument/2006/relationships" xmlns:p="http://schemas.openxmlformats.org/presentationml/2006/main" showSpecialPlsOnTitleSld="0" strictFirstAndLastChars="0" saveSubsetFonts="1">
+<p:presentation xmlns:a="http://schemas.openxmlformats.org/drawingml/2006/main" xmlns:r="http://schemas.openxmlformats.org/officeDocument/2006/relationships" xmlns:p="http://schemas.openxmlformats.org/presentationml/2006/main" showSpecialPlsOnTitleSld="0" strictFirstAndLastChars="0" embedTrueTypeFonts="1" saveSubsetFonts="1">
   <p:sldMasterIdLst>
     <p:sldMasterId id="2147485087" r:id="rId1"/>
   </p:sldMasterIdLst>
@@ -203,7 +203,8 @@
 <file path=ppt/revisionInfo.xml><?xml version="1.0" encoding="utf-8"?>
 <p1510:revInfo xmlns:a="http://schemas.openxmlformats.org/drawingml/2006/main" xmlns:r="http://schemas.openxmlformats.org/officeDocument/2006/relationships" xmlns:p1510="http://schemas.microsoft.com/office/powerpoint/2015/10/main">
   <p1510:revLst>
-    <p1510:client id="{9D1D2A12-E498-4591-8453-6D1E333D30CC}" v="231" dt="2026-02-19T02:41:15.505"/>
+    <p1510:client id="{2326E25E-488C-45FF-AA3C-59425179819A}" v="1" dt="2026-02-19T05:45:48.083"/>
+    <p1510:client id="{9D1D2A12-E498-4591-8453-6D1E333D30CC}" v="232" dt="2026-02-19T05:44:32.386"/>
   </p1510:revLst>
 </p1510:revInfo>
 </file>
@@ -212,19 +213,19 @@
 <pc:chgInfo xmlns:a="http://schemas.openxmlformats.org/drawingml/2006/main" xmlns:r="http://schemas.openxmlformats.org/officeDocument/2006/relationships" xmlns:ac="http://schemas.microsoft.com/office/drawing/2013/main/command" xmlns:pc="http://schemas.microsoft.com/office/powerpoint/2013/main/command">
   <pc:docChgLst>
     <pc:chgData name="Zhao Jin" userId="cd05a825-544c-438a-9ba1-08e63db50b47" providerId="ADAL" clId="{5DF3A229-1965-414E-AF54-F4C37AC7DF68}"/>
-    <pc:docChg chg="undo custSel addSld delSld modSld">
-      <pc:chgData name="Zhao Jin" userId="cd05a825-544c-438a-9ba1-08e63db50b47" providerId="ADAL" clId="{5DF3A229-1965-414E-AF54-F4C37AC7DF68}" dt="2026-02-19T02:44:26.227" v="767" actId="403"/>
+    <pc:docChg chg="custSel modSld">
+      <pc:chgData name="Zhao Jin" userId="cd05a825-544c-438a-9ba1-08e63db50b47" providerId="ADAL" clId="{5DF3A229-1965-414E-AF54-F4C37AC7DF68}" dt="2026-02-19T05:45:52.690" v="63" actId="20577"/>
       <pc:docMkLst>
         <pc:docMk/>
       </pc:docMkLst>
       <pc:sldChg chg="modSp mod">
-        <pc:chgData name="Zhao Jin" userId="cd05a825-544c-438a-9ba1-08e63db50b47" providerId="ADAL" clId="{5DF3A229-1965-414E-AF54-F4C37AC7DF68}" dt="2026-02-19T02:40:54.292" v="525" actId="5793"/>
+        <pc:chgData name="Zhao Jin" userId="cd05a825-544c-438a-9ba1-08e63db50b47" providerId="ADAL" clId="{5DF3A229-1965-414E-AF54-F4C37AC7DF68}" dt="2026-02-19T05:45:52.690" v="63" actId="20577"/>
         <pc:sldMkLst>
           <pc:docMk/>
           <pc:sldMk cId="1067695719" sldId="526"/>
         </pc:sldMkLst>
         <pc:spChg chg="mod">
-          <ac:chgData name="Zhao Jin" userId="cd05a825-544c-438a-9ba1-08e63db50b47" providerId="ADAL" clId="{5DF3A229-1965-414E-AF54-F4C37AC7DF68}" dt="2026-02-19T02:40:54.292" v="525" actId="5793"/>
+          <ac:chgData name="Zhao Jin" userId="cd05a825-544c-438a-9ba1-08e63db50b47" providerId="ADAL" clId="{5DF3A229-1965-414E-AF54-F4C37AC7DF68}" dt="2026-02-19T05:45:52.690" v="63" actId="20577"/>
           <ac:spMkLst>
             <pc:docMk/>
             <pc:sldMk cId="1067695719" sldId="526"/>
@@ -232,448 +233,12 @@
           </ac:spMkLst>
         </pc:spChg>
       </pc:sldChg>
-      <pc:sldChg chg="modSp mod modAnim">
-        <pc:chgData name="Zhao Jin" userId="cd05a825-544c-438a-9ba1-08e63db50b47" providerId="ADAL" clId="{5DF3A229-1965-414E-AF54-F4C37AC7DF68}" dt="2026-02-19T02:20:04.324" v="364" actId="1076"/>
-        <pc:sldMkLst>
-          <pc:docMk/>
-          <pc:sldMk cId="1427618944" sldId="553"/>
-        </pc:sldMkLst>
-        <pc:spChg chg="mod">
-          <ac:chgData name="Zhao Jin" userId="cd05a825-544c-438a-9ba1-08e63db50b47" providerId="ADAL" clId="{5DF3A229-1965-414E-AF54-F4C37AC7DF68}" dt="2026-02-19T02:20:04.324" v="364" actId="1076"/>
-          <ac:spMkLst>
-            <pc:docMk/>
-            <pc:sldMk cId="1427618944" sldId="553"/>
-            <ac:spMk id="6" creationId="{782602F1-4498-910D-BC7E-E2B3F4609A47}"/>
-          </ac:spMkLst>
-        </pc:spChg>
-        <pc:spChg chg="mod">
-          <ac:chgData name="Zhao Jin" userId="cd05a825-544c-438a-9ba1-08e63db50b47" providerId="ADAL" clId="{5DF3A229-1965-414E-AF54-F4C37AC7DF68}" dt="2026-02-16T05:09:11.474" v="3" actId="5793"/>
-          <ac:spMkLst>
-            <pc:docMk/>
-            <pc:sldMk cId="1427618944" sldId="553"/>
-            <ac:spMk id="8" creationId="{00000000-0000-0000-0000-000000000000}"/>
-          </ac:spMkLst>
-        </pc:spChg>
-      </pc:sldChg>
-      <pc:sldChg chg="addSp modSp mod modAnim">
-        <pc:chgData name="Zhao Jin" userId="cd05a825-544c-438a-9ba1-08e63db50b47" providerId="ADAL" clId="{5DF3A229-1965-414E-AF54-F4C37AC7DF68}" dt="2026-02-19T02:38:22.772" v="517"/>
-        <pc:sldMkLst>
-          <pc:docMk/>
-          <pc:sldMk cId="894186310" sldId="564"/>
-        </pc:sldMkLst>
-        <pc:spChg chg="add mod">
-          <ac:chgData name="Zhao Jin" userId="cd05a825-544c-438a-9ba1-08e63db50b47" providerId="ADAL" clId="{5DF3A229-1965-414E-AF54-F4C37AC7DF68}" dt="2026-02-19T02:38:18.335" v="516" actId="692"/>
-          <ac:spMkLst>
-            <pc:docMk/>
-            <pc:sldMk cId="894186310" sldId="564"/>
-            <ac:spMk id="5" creationId="{4E583137-1FEF-B8C7-5EE8-D19957E733C2}"/>
-          </ac:spMkLst>
-        </pc:spChg>
-      </pc:sldChg>
-      <pc:sldChg chg="modSp mod addAnim delAnim modAnim">
-        <pc:chgData name="Zhao Jin" userId="cd05a825-544c-438a-9ba1-08e63db50b47" providerId="ADAL" clId="{5DF3A229-1965-414E-AF54-F4C37AC7DF68}" dt="2026-02-19T02:23:10.770" v="376"/>
-        <pc:sldMkLst>
-          <pc:docMk/>
-          <pc:sldMk cId="2765734217" sldId="601"/>
-        </pc:sldMkLst>
-        <pc:spChg chg="mod">
-          <ac:chgData name="Zhao Jin" userId="cd05a825-544c-438a-9ba1-08e63db50b47" providerId="ADAL" clId="{5DF3A229-1965-414E-AF54-F4C37AC7DF68}" dt="2026-02-16T05:09:55.049" v="21" actId="207"/>
-          <ac:spMkLst>
-            <pc:docMk/>
-            <pc:sldMk cId="2765734217" sldId="601"/>
-            <ac:spMk id="84" creationId="{C4E05674-68A2-0D4E-8B47-F7A2C6A6B76F}"/>
-          </ac:spMkLst>
-        </pc:spChg>
-      </pc:sldChg>
-      <pc:sldChg chg="modSp mod addAnim delAnim modAnim">
-        <pc:chgData name="Zhao Jin" userId="cd05a825-544c-438a-9ba1-08e63db50b47" providerId="ADAL" clId="{5DF3A229-1965-414E-AF54-F4C37AC7DF68}" dt="2026-02-19T02:21:26.196" v="368"/>
-        <pc:sldMkLst>
-          <pc:docMk/>
-          <pc:sldMk cId="193223856" sldId="602"/>
-        </pc:sldMkLst>
-        <pc:spChg chg="mod">
-          <ac:chgData name="Zhao Jin" userId="cd05a825-544c-438a-9ba1-08e63db50b47" providerId="ADAL" clId="{5DF3A229-1965-414E-AF54-F4C37AC7DF68}" dt="2026-02-19T02:18:53.982" v="316" actId="1035"/>
-          <ac:spMkLst>
-            <pc:docMk/>
-            <pc:sldMk cId="193223856" sldId="602"/>
-            <ac:spMk id="6" creationId="{6BCCF1FD-7C45-41D0-AB05-C3F94D8F0496}"/>
-          </ac:spMkLst>
-        </pc:spChg>
-        <pc:spChg chg="mod">
-          <ac:chgData name="Zhao Jin" userId="cd05a825-544c-438a-9ba1-08e63db50b47" providerId="ADAL" clId="{5DF3A229-1965-414E-AF54-F4C37AC7DF68}" dt="2026-02-19T02:18:39.429" v="309" actId="20577"/>
-          <ac:spMkLst>
-            <pc:docMk/>
-            <pc:sldMk cId="193223856" sldId="602"/>
-            <ac:spMk id="8" creationId="{00000000-0000-0000-0000-000000000000}"/>
-          </ac:spMkLst>
-        </pc:spChg>
-      </pc:sldChg>
-      <pc:sldChg chg="addSp delSp modSp mod modAnim">
-        <pc:chgData name="Zhao Jin" userId="cd05a825-544c-438a-9ba1-08e63db50b47" providerId="ADAL" clId="{5DF3A229-1965-414E-AF54-F4C37AC7DF68}" dt="2026-02-19T02:33:25.141" v="478"/>
-        <pc:sldMkLst>
-          <pc:docMk/>
-          <pc:sldMk cId="3367516905" sldId="603"/>
-        </pc:sldMkLst>
-        <pc:spChg chg="del">
-          <ac:chgData name="Zhao Jin" userId="cd05a825-544c-438a-9ba1-08e63db50b47" providerId="ADAL" clId="{5DF3A229-1965-414E-AF54-F4C37AC7DF68}" dt="2026-02-19T02:33:18.990" v="475" actId="478"/>
-          <ac:spMkLst>
-            <pc:docMk/>
-            <pc:sldMk cId="3367516905" sldId="603"/>
-            <ac:spMk id="15" creationId="{6058EEA1-8773-4821-B3B0-5436B0F6DC30}"/>
-          </ac:spMkLst>
-        </pc:spChg>
-        <pc:picChg chg="add mod">
-          <ac:chgData name="Zhao Jin" userId="cd05a825-544c-438a-9ba1-08e63db50b47" providerId="ADAL" clId="{5DF3A229-1965-414E-AF54-F4C37AC7DF68}" dt="2026-02-19T02:33:22.539" v="476"/>
-          <ac:picMkLst>
-            <pc:docMk/>
-            <pc:sldMk cId="3367516905" sldId="603"/>
-            <ac:picMk id="3" creationId="{3BF0CE0F-7A7B-C32F-DBCB-34C96CB9A5F9}"/>
-          </ac:picMkLst>
-        </pc:picChg>
-        <pc:picChg chg="del mod">
-          <ac:chgData name="Zhao Jin" userId="cd05a825-544c-438a-9ba1-08e63db50b47" providerId="ADAL" clId="{5DF3A229-1965-414E-AF54-F4C37AC7DF68}" dt="2026-02-19T02:33:23.699" v="477" actId="478"/>
-          <ac:picMkLst>
-            <pc:docMk/>
-            <pc:sldMk cId="3367516905" sldId="603"/>
-            <ac:picMk id="4" creationId="{C893E5D5-CCC6-1A54-C7F5-B261FADE948A}"/>
-          </ac:picMkLst>
-        </pc:picChg>
-      </pc:sldChg>
-      <pc:sldChg chg="addSp delSp modSp mod addAnim delAnim modAnim">
-        <pc:chgData name="Zhao Jin" userId="cd05a825-544c-438a-9ba1-08e63db50b47" providerId="ADAL" clId="{5DF3A229-1965-414E-AF54-F4C37AC7DF68}" dt="2026-02-19T02:33:01.263" v="474"/>
-        <pc:sldMkLst>
-          <pc:docMk/>
-          <pc:sldMk cId="600747522" sldId="604"/>
-        </pc:sldMkLst>
-        <pc:spChg chg="mod">
-          <ac:chgData name="Zhao Jin" userId="cd05a825-544c-438a-9ba1-08e63db50b47" providerId="ADAL" clId="{5DF3A229-1965-414E-AF54-F4C37AC7DF68}" dt="2026-02-16T05:10:06.679" v="26" actId="207"/>
-          <ac:spMkLst>
-            <pc:docMk/>
-            <pc:sldMk cId="600747522" sldId="604"/>
-            <ac:spMk id="11" creationId="{77437CA0-C20C-4626-A0E0-998E2B6D678A}"/>
-          </ac:spMkLst>
-        </pc:spChg>
-        <pc:spChg chg="del mod">
-          <ac:chgData name="Zhao Jin" userId="cd05a825-544c-438a-9ba1-08e63db50b47" providerId="ADAL" clId="{5DF3A229-1965-414E-AF54-F4C37AC7DF68}" dt="2026-02-19T02:27:52.449" v="437" actId="478"/>
-          <ac:spMkLst>
-            <pc:docMk/>
-            <pc:sldMk cId="600747522" sldId="604"/>
-            <ac:spMk id="15" creationId="{6058EEA1-8773-4821-B3B0-5436B0F6DC30}"/>
-          </ac:spMkLst>
-        </pc:spChg>
-        <pc:picChg chg="mod modCrop">
-          <ac:chgData name="Zhao Jin" userId="cd05a825-544c-438a-9ba1-08e63db50b47" providerId="ADAL" clId="{5DF3A229-1965-414E-AF54-F4C37AC7DF68}" dt="2026-02-19T02:26:52.931" v="428" actId="1076"/>
-          <ac:picMkLst>
-            <pc:docMk/>
-            <pc:sldMk cId="600747522" sldId="604"/>
-            <ac:picMk id="3" creationId="{D1A42C95-4840-4615-9807-715729F687F8}"/>
-          </ac:picMkLst>
-        </pc:picChg>
-        <pc:picChg chg="mod ord">
-          <ac:chgData name="Zhao Jin" userId="cd05a825-544c-438a-9ba1-08e63db50b47" providerId="ADAL" clId="{5DF3A229-1965-414E-AF54-F4C37AC7DF68}" dt="2026-02-19T02:28:18.782" v="443" actId="1076"/>
-          <ac:picMkLst>
-            <pc:docMk/>
-            <pc:sldMk cId="600747522" sldId="604"/>
-            <ac:picMk id="13" creationId="{3731ABF8-9D8D-EC49-3470-44E5819FF8D7}"/>
-          </ac:picMkLst>
-        </pc:picChg>
-        <pc:picChg chg="add mod modCrop">
-          <ac:chgData name="Zhao Jin" userId="cd05a825-544c-438a-9ba1-08e63db50b47" providerId="ADAL" clId="{5DF3A229-1965-414E-AF54-F4C37AC7DF68}" dt="2026-02-19T02:26:48.786" v="426" actId="1076"/>
-          <ac:picMkLst>
-            <pc:docMk/>
-            <pc:sldMk cId="600747522" sldId="604"/>
-            <ac:picMk id="14" creationId="{3869DA3C-08EE-018E-F829-581A400139FE}"/>
-          </ac:picMkLst>
-        </pc:picChg>
-        <pc:picChg chg="add mod">
-          <ac:chgData name="Zhao Jin" userId="cd05a825-544c-438a-9ba1-08e63db50b47" providerId="ADAL" clId="{5DF3A229-1965-414E-AF54-F4C37AC7DF68}" dt="2026-02-19T02:28:17.146" v="442" actId="1076"/>
-          <ac:picMkLst>
-            <pc:docMk/>
-            <pc:sldMk cId="600747522" sldId="604"/>
-            <ac:picMk id="16" creationId="{093AA06F-6AC3-FC99-D556-74E60C0F06F1}"/>
-          </ac:picMkLst>
-        </pc:picChg>
-        <pc:picChg chg="add mod">
-          <ac:chgData name="Zhao Jin" userId="cd05a825-544c-438a-9ba1-08e63db50b47" providerId="ADAL" clId="{5DF3A229-1965-414E-AF54-F4C37AC7DF68}" dt="2026-02-19T02:32:09.236" v="466" actId="1076"/>
-          <ac:picMkLst>
-            <pc:docMk/>
-            <pc:sldMk cId="600747522" sldId="604"/>
-            <ac:picMk id="18" creationId="{292179CE-60D9-5B7F-23DB-DE4CADF51505}"/>
-          </ac:picMkLst>
-        </pc:picChg>
-        <pc:cxnChg chg="add mod">
-          <ac:chgData name="Zhao Jin" userId="cd05a825-544c-438a-9ba1-08e63db50b47" providerId="ADAL" clId="{5DF3A229-1965-414E-AF54-F4C37AC7DF68}" dt="2026-02-19T02:25:04.618" v="407" actId="1076"/>
-          <ac:cxnSpMkLst>
-            <pc:docMk/>
-            <pc:sldMk cId="600747522" sldId="604"/>
-            <ac:cxnSpMk id="6" creationId="{62C001D3-8A63-BC2D-0AA0-D55835B660DD}"/>
-          </ac:cxnSpMkLst>
-        </pc:cxnChg>
-        <pc:cxnChg chg="ord">
-          <ac:chgData name="Zhao Jin" userId="cd05a825-544c-438a-9ba1-08e63db50b47" providerId="ADAL" clId="{5DF3A229-1965-414E-AF54-F4C37AC7DF68}" dt="2026-02-19T02:30:09.256" v="458" actId="166"/>
-          <ac:cxnSpMkLst>
-            <pc:docMk/>
-            <pc:sldMk cId="600747522" sldId="604"/>
-            <ac:cxnSpMk id="10" creationId="{1EAE10E3-8B14-B995-93FE-BD466BD11649}"/>
-          </ac:cxnSpMkLst>
-        </pc:cxnChg>
-      </pc:sldChg>
-      <pc:sldChg chg="addSp delSp modSp mod modAnim">
-        <pc:chgData name="Zhao Jin" userId="cd05a825-544c-438a-9ba1-08e63db50b47" providerId="ADAL" clId="{5DF3A229-1965-414E-AF54-F4C37AC7DF68}" dt="2026-02-19T02:34:27.347" v="487"/>
-        <pc:sldMkLst>
-          <pc:docMk/>
-          <pc:sldMk cId="934825191" sldId="605"/>
-        </pc:sldMkLst>
-        <pc:spChg chg="mod">
-          <ac:chgData name="Zhao Jin" userId="cd05a825-544c-438a-9ba1-08e63db50b47" providerId="ADAL" clId="{5DF3A229-1965-414E-AF54-F4C37AC7DF68}" dt="2026-02-19T02:34:07.189" v="483"/>
-          <ac:spMkLst>
-            <pc:docMk/>
-            <pc:sldMk cId="934825191" sldId="605"/>
-            <ac:spMk id="11" creationId="{77437CA0-C20C-4626-A0E0-998E2B6D678A}"/>
-          </ac:spMkLst>
-        </pc:spChg>
-        <pc:spChg chg="del">
-          <ac:chgData name="Zhao Jin" userId="cd05a825-544c-438a-9ba1-08e63db50b47" providerId="ADAL" clId="{5DF3A229-1965-414E-AF54-F4C37AC7DF68}" dt="2026-02-19T02:33:36.997" v="479" actId="478"/>
-          <ac:spMkLst>
-            <pc:docMk/>
-            <pc:sldMk cId="934825191" sldId="605"/>
-            <ac:spMk id="13" creationId="{35357FA8-4662-4E00-A4CC-337EA26A680D}"/>
-          </ac:spMkLst>
-        </pc:spChg>
-        <pc:picChg chg="del">
-          <ac:chgData name="Zhao Jin" userId="cd05a825-544c-438a-9ba1-08e63db50b47" providerId="ADAL" clId="{5DF3A229-1965-414E-AF54-F4C37AC7DF68}" dt="2026-02-19T02:33:40.984" v="480" actId="478"/>
-          <ac:picMkLst>
-            <pc:docMk/>
-            <pc:sldMk cId="934825191" sldId="605"/>
-            <ac:picMk id="4" creationId="{409A92A3-5250-CC28-21BB-645F1E244B8C}"/>
-          </ac:picMkLst>
-        </pc:picChg>
-        <pc:picChg chg="add mod">
-          <ac:chgData name="Zhao Jin" userId="cd05a825-544c-438a-9ba1-08e63db50b47" providerId="ADAL" clId="{5DF3A229-1965-414E-AF54-F4C37AC7DF68}" dt="2026-02-19T02:33:44.901" v="481"/>
-          <ac:picMkLst>
-            <pc:docMk/>
-            <pc:sldMk cId="934825191" sldId="605"/>
-            <ac:picMk id="5" creationId="{3F64B18E-9DA3-77F7-C514-86E603A10DAE}"/>
-          </ac:picMkLst>
-        </pc:picChg>
-        <pc:picChg chg="add mod">
-          <ac:chgData name="Zhao Jin" userId="cd05a825-544c-438a-9ba1-08e63db50b47" providerId="ADAL" clId="{5DF3A229-1965-414E-AF54-F4C37AC7DF68}" dt="2026-02-19T02:34:27.347" v="487"/>
-          <ac:picMkLst>
-            <pc:docMk/>
-            <pc:sldMk cId="934825191" sldId="605"/>
-            <ac:picMk id="6" creationId="{8225D593-8549-65F6-020E-A83A8A91E08E}"/>
-          </ac:picMkLst>
-        </pc:picChg>
-      </pc:sldChg>
-      <pc:sldChg chg="addSp delSp modSp mod">
-        <pc:chgData name="Zhao Jin" userId="cd05a825-544c-438a-9ba1-08e63db50b47" providerId="ADAL" clId="{5DF3A229-1965-414E-AF54-F4C37AC7DF68}" dt="2026-02-19T02:34:29.780" v="488"/>
-        <pc:sldMkLst>
-          <pc:docMk/>
-          <pc:sldMk cId="640598186" sldId="606"/>
-        </pc:sldMkLst>
-        <pc:spChg chg="mod">
-          <ac:chgData name="Zhao Jin" userId="cd05a825-544c-438a-9ba1-08e63db50b47" providerId="ADAL" clId="{5DF3A229-1965-414E-AF54-F4C37AC7DF68}" dt="2026-02-16T05:10:23.725" v="31" actId="207"/>
-          <ac:spMkLst>
-            <pc:docMk/>
-            <pc:sldMk cId="640598186" sldId="606"/>
-            <ac:spMk id="11" creationId="{77437CA0-C20C-4626-A0E0-998E2B6D678A}"/>
-          </ac:spMkLst>
-        </pc:spChg>
-        <pc:spChg chg="del">
-          <ac:chgData name="Zhao Jin" userId="cd05a825-544c-438a-9ba1-08e63db50b47" providerId="ADAL" clId="{5DF3A229-1965-414E-AF54-F4C37AC7DF68}" dt="2026-02-19T02:34:13.179" v="484" actId="478"/>
-          <ac:spMkLst>
-            <pc:docMk/>
-            <pc:sldMk cId="640598186" sldId="606"/>
-            <ac:spMk id="15" creationId="{6058EEA1-8773-4821-B3B0-5436B0F6DC30}"/>
-          </ac:spMkLst>
-        </pc:spChg>
-        <pc:picChg chg="del mod">
-          <ac:chgData name="Zhao Jin" userId="cd05a825-544c-438a-9ba1-08e63db50b47" providerId="ADAL" clId="{5DF3A229-1965-414E-AF54-F4C37AC7DF68}" dt="2026-02-19T02:34:22.578" v="486" actId="478"/>
-          <ac:picMkLst>
-            <pc:docMk/>
-            <pc:sldMk cId="640598186" sldId="606"/>
-            <ac:picMk id="4" creationId="{BA4355B6-666A-3EC4-3D3C-7661C7D7FAB8}"/>
-          </ac:picMkLst>
-        </pc:picChg>
-        <pc:picChg chg="add mod">
-          <ac:chgData name="Zhao Jin" userId="cd05a825-544c-438a-9ba1-08e63db50b47" providerId="ADAL" clId="{5DF3A229-1965-414E-AF54-F4C37AC7DF68}" dt="2026-02-19T02:34:29.780" v="488"/>
-          <ac:picMkLst>
-            <pc:docMk/>
-            <pc:sldMk cId="640598186" sldId="606"/>
-            <ac:picMk id="6" creationId="{45BFDC36-E3FE-97B0-F7DD-6C10D99F178D}"/>
-          </ac:picMkLst>
-        </pc:picChg>
-      </pc:sldChg>
-      <pc:sldChg chg="addSp modSp mod addAnim delAnim modAnim">
-        <pc:chgData name="Zhao Jin" userId="cd05a825-544c-438a-9ba1-08e63db50b47" providerId="ADAL" clId="{5DF3A229-1965-414E-AF54-F4C37AC7DF68}" dt="2026-02-19T02:35:17.630" v="499"/>
-        <pc:sldMkLst>
-          <pc:docMk/>
-          <pc:sldMk cId="3642427802" sldId="607"/>
-        </pc:sldMkLst>
-        <pc:picChg chg="add mod">
-          <ac:chgData name="Zhao Jin" userId="cd05a825-544c-438a-9ba1-08e63db50b47" providerId="ADAL" clId="{5DF3A229-1965-414E-AF54-F4C37AC7DF68}" dt="2026-02-19T02:34:45.871" v="497" actId="1076"/>
-          <ac:picMkLst>
-            <pc:docMk/>
-            <pc:sldMk cId="3642427802" sldId="607"/>
-            <ac:picMk id="2" creationId="{8E5434C3-669A-8AA8-3381-1A6C1E843EAA}"/>
-          </ac:picMkLst>
-        </pc:picChg>
-        <pc:picChg chg="add mod">
-          <ac:chgData name="Zhao Jin" userId="cd05a825-544c-438a-9ba1-08e63db50b47" providerId="ADAL" clId="{5DF3A229-1965-414E-AF54-F4C37AC7DF68}" dt="2026-02-19T02:34:45.871" v="497" actId="1076"/>
-          <ac:picMkLst>
-            <pc:docMk/>
-            <pc:sldMk cId="3642427802" sldId="607"/>
-            <ac:picMk id="4" creationId="{0406AC9C-45DA-1B75-552B-971E4083885D}"/>
-          </ac:picMkLst>
-        </pc:picChg>
-        <pc:picChg chg="add mod">
-          <ac:chgData name="Zhao Jin" userId="cd05a825-544c-438a-9ba1-08e63db50b47" providerId="ADAL" clId="{5DF3A229-1965-414E-AF54-F4C37AC7DF68}" dt="2026-02-19T02:34:45.871" v="497" actId="1076"/>
-          <ac:picMkLst>
-            <pc:docMk/>
-            <pc:sldMk cId="3642427802" sldId="607"/>
-            <ac:picMk id="5" creationId="{FDED8B56-2BA3-C6FA-36E1-783FFCBC3AD5}"/>
-          </ac:picMkLst>
-        </pc:picChg>
-        <pc:picChg chg="add mod">
-          <ac:chgData name="Zhao Jin" userId="cd05a825-544c-438a-9ba1-08e63db50b47" providerId="ADAL" clId="{5DF3A229-1965-414E-AF54-F4C37AC7DF68}" dt="2026-02-19T02:34:45.871" v="497" actId="1076"/>
-          <ac:picMkLst>
-            <pc:docMk/>
-            <pc:sldMk cId="3642427802" sldId="607"/>
-            <ac:picMk id="9" creationId="{BD6CE2B6-62BF-DCAE-E514-B5DEBF8F4B10}"/>
-          </ac:picMkLst>
-        </pc:picChg>
-        <pc:picChg chg="add mod">
-          <ac:chgData name="Zhao Jin" userId="cd05a825-544c-438a-9ba1-08e63db50b47" providerId="ADAL" clId="{5DF3A229-1965-414E-AF54-F4C37AC7DF68}" dt="2026-02-19T02:34:45.871" v="497" actId="1076"/>
-          <ac:picMkLst>
-            <pc:docMk/>
-            <pc:sldMk cId="3642427802" sldId="607"/>
-            <ac:picMk id="10" creationId="{0EBDBE63-ACB6-8792-3215-ED70A5A6FFF3}"/>
-          </ac:picMkLst>
-        </pc:picChg>
-        <pc:picChg chg="add mod">
-          <ac:chgData name="Zhao Jin" userId="cd05a825-544c-438a-9ba1-08e63db50b47" providerId="ADAL" clId="{5DF3A229-1965-414E-AF54-F4C37AC7DF68}" dt="2026-02-19T02:34:45.871" v="497" actId="1076"/>
-          <ac:picMkLst>
-            <pc:docMk/>
-            <pc:sldMk cId="3642427802" sldId="607"/>
-            <ac:picMk id="13" creationId="{F95E0B42-D548-8BB2-F1E0-005CF0057580}"/>
-          </ac:picMkLst>
-        </pc:picChg>
-        <pc:picChg chg="add mod">
-          <ac:chgData name="Zhao Jin" userId="cd05a825-544c-438a-9ba1-08e63db50b47" providerId="ADAL" clId="{5DF3A229-1965-414E-AF54-F4C37AC7DF68}" dt="2026-02-19T02:34:45.871" v="497" actId="1076"/>
-          <ac:picMkLst>
-            <pc:docMk/>
-            <pc:sldMk cId="3642427802" sldId="607"/>
-            <ac:picMk id="14" creationId="{CB356C64-F8A5-983D-6729-6C27D0C1250F}"/>
-          </ac:picMkLst>
-        </pc:picChg>
-        <pc:picChg chg="add mod">
-          <ac:chgData name="Zhao Jin" userId="cd05a825-544c-438a-9ba1-08e63db50b47" providerId="ADAL" clId="{5DF3A229-1965-414E-AF54-F4C37AC7DF68}" dt="2026-02-19T02:34:45.871" v="497" actId="1076"/>
-          <ac:picMkLst>
-            <pc:docMk/>
-            <pc:sldMk cId="3642427802" sldId="607"/>
-            <ac:picMk id="15" creationId="{86CA064A-DEBC-771C-FCC3-49CDEDA646C6}"/>
-          </ac:picMkLst>
-        </pc:picChg>
-      </pc:sldChg>
-      <pc:sldChg chg="addSp modSp mod modAnim">
-        <pc:chgData name="Zhao Jin" userId="cd05a825-544c-438a-9ba1-08e63db50b47" providerId="ADAL" clId="{5DF3A229-1965-414E-AF54-F4C37AC7DF68}" dt="2026-02-16T05:12:33.223" v="134" actId="20577"/>
+      <pc:sldChg chg="addAnim delAnim modAnim">
+        <pc:chgData name="Zhao Jin" userId="cd05a825-544c-438a-9ba1-08e63db50b47" providerId="ADAL" clId="{5DF3A229-1965-414E-AF54-F4C37AC7DF68}" dt="2026-02-19T05:44:37.130" v="1"/>
         <pc:sldMkLst>
           <pc:docMk/>
           <pc:sldMk cId="3503582036" sldId="622"/>
         </pc:sldMkLst>
-        <pc:spChg chg="add mod">
-          <ac:chgData name="Zhao Jin" userId="cd05a825-544c-438a-9ba1-08e63db50b47" providerId="ADAL" clId="{5DF3A229-1965-414E-AF54-F4C37AC7DF68}" dt="2026-02-16T05:12:33.223" v="134" actId="20577"/>
-          <ac:spMkLst>
-            <pc:docMk/>
-            <pc:sldMk cId="3503582036" sldId="622"/>
-            <ac:spMk id="9" creationId="{007B0F2B-6A05-2556-6F20-5D1194837053}"/>
-          </ac:spMkLst>
-        </pc:spChg>
-        <pc:spChg chg="mod">
-          <ac:chgData name="Zhao Jin" userId="cd05a825-544c-438a-9ba1-08e63db50b47" providerId="ADAL" clId="{5DF3A229-1965-414E-AF54-F4C37AC7DF68}" dt="2026-02-16T05:11:17.208" v="37" actId="20577"/>
-          <ac:spMkLst>
-            <pc:docMk/>
-            <pc:sldMk cId="3503582036" sldId="622"/>
-            <ac:spMk id="40" creationId="{00000000-0000-0000-0000-000000000000}"/>
-          </ac:spMkLst>
-        </pc:spChg>
-        <pc:spChg chg="mod">
-          <ac:chgData name="Zhao Jin" userId="cd05a825-544c-438a-9ba1-08e63db50b47" providerId="ADAL" clId="{5DF3A229-1965-414E-AF54-F4C37AC7DF68}" dt="2026-02-16T05:12:30.965" v="133" actId="20577"/>
-          <ac:spMkLst>
-            <pc:docMk/>
-            <pc:sldMk cId="3503582036" sldId="622"/>
-            <ac:spMk id="43" creationId="{00000000-0000-0000-0000-000000000000}"/>
-          </ac:spMkLst>
-        </pc:spChg>
-        <pc:cxnChg chg="add mod">
-          <ac:chgData name="Zhao Jin" userId="cd05a825-544c-438a-9ba1-08e63db50b47" providerId="ADAL" clId="{5DF3A229-1965-414E-AF54-F4C37AC7DF68}" dt="2026-02-16T05:11:51.934" v="41" actId="14100"/>
-          <ac:cxnSpMkLst>
-            <pc:docMk/>
-            <pc:sldMk cId="3503582036" sldId="622"/>
-            <ac:cxnSpMk id="5" creationId="{1D5DDA06-7BD2-87CE-073A-48BF7D66D747}"/>
-          </ac:cxnSpMkLst>
-        </pc:cxnChg>
-      </pc:sldChg>
-      <pc:sldChg chg="addAnim delAnim modAnim">
-        <pc:chgData name="Zhao Jin" userId="cd05a825-544c-438a-9ba1-08e63db50b47" providerId="ADAL" clId="{5DF3A229-1965-414E-AF54-F4C37AC7DF68}" dt="2026-02-19T02:36:03.181" v="502"/>
-        <pc:sldMkLst>
-          <pc:docMk/>
-          <pc:sldMk cId="2900383044" sldId="642"/>
-        </pc:sldMkLst>
-      </pc:sldChg>
-      <pc:sldChg chg="del">
-        <pc:chgData name="Zhao Jin" userId="cd05a825-544c-438a-9ba1-08e63db50b47" providerId="ADAL" clId="{5DF3A229-1965-414E-AF54-F4C37AC7DF68}" dt="2026-02-19T02:37:57.608" v="507" actId="47"/>
-        <pc:sldMkLst>
-          <pc:docMk/>
-          <pc:sldMk cId="719017714" sldId="644"/>
-        </pc:sldMkLst>
-      </pc:sldChg>
-      <pc:sldChg chg="addSp delSp modSp add mod">
-        <pc:chgData name="Zhao Jin" userId="cd05a825-544c-438a-9ba1-08e63db50b47" providerId="ADAL" clId="{5DF3A229-1965-414E-AF54-F4C37AC7DF68}" dt="2026-02-19T02:44:26.227" v="767" actId="403"/>
-        <pc:sldMkLst>
-          <pc:docMk/>
-          <pc:sldMk cId="1414353441" sldId="646"/>
-        </pc:sldMkLst>
-        <pc:spChg chg="add del mod">
-          <ac:chgData name="Zhao Jin" userId="cd05a825-544c-438a-9ba1-08e63db50b47" providerId="ADAL" clId="{5DF3A229-1965-414E-AF54-F4C37AC7DF68}" dt="2026-02-19T02:41:14.299" v="536" actId="478"/>
-          <ac:spMkLst>
-            <pc:docMk/>
-            <pc:sldMk cId="1414353441" sldId="646"/>
-            <ac:spMk id="4" creationId="{6720BEB0-278B-39C4-726C-92BE95BEC6F5}"/>
-          </ac:spMkLst>
-        </pc:spChg>
-        <pc:spChg chg="add mod">
-          <ac:chgData name="Zhao Jin" userId="cd05a825-544c-438a-9ba1-08e63db50b47" providerId="ADAL" clId="{5DF3A229-1965-414E-AF54-F4C37AC7DF68}" dt="2026-02-19T02:41:21.837" v="562" actId="20577"/>
-          <ac:spMkLst>
-            <pc:docMk/>
-            <pc:sldMk cId="1414353441" sldId="646"/>
-            <ac:spMk id="5" creationId="{5FFB8BAB-4C2A-0B3D-48A1-99993A14B541}"/>
-          </ac:spMkLst>
-        </pc:spChg>
-        <pc:spChg chg="add mod">
-          <ac:chgData name="Zhao Jin" userId="cd05a825-544c-438a-9ba1-08e63db50b47" providerId="ADAL" clId="{5DF3A229-1965-414E-AF54-F4C37AC7DF68}" dt="2026-02-19T02:44:26.227" v="767" actId="403"/>
-          <ac:spMkLst>
-            <pc:docMk/>
-            <pc:sldMk cId="1414353441" sldId="646"/>
-            <ac:spMk id="7" creationId="{68FE83B9-5DAF-C4E0-7BA6-EE8195BF0690}"/>
-          </ac:spMkLst>
-        </pc:spChg>
-        <pc:spChg chg="del">
-          <ac:chgData name="Zhao Jin" userId="cd05a825-544c-438a-9ba1-08e63db50b47" providerId="ADAL" clId="{5DF3A229-1965-414E-AF54-F4C37AC7DF68}" dt="2026-02-19T02:41:07.389" v="527" actId="478"/>
-          <ac:spMkLst>
-            <pc:docMk/>
-            <pc:sldMk cId="1414353441" sldId="646"/>
-            <ac:spMk id="13" creationId="{2B3535DD-BA32-5FAB-EAAA-C33E0E6874AE}"/>
-          </ac:spMkLst>
-        </pc:spChg>
-        <pc:spChg chg="del mod">
-          <ac:chgData name="Zhao Jin" userId="cd05a825-544c-438a-9ba1-08e63db50b47" providerId="ADAL" clId="{5DF3A229-1965-414E-AF54-F4C37AC7DF68}" dt="2026-02-19T02:41:12.675" v="535" actId="478"/>
-          <ac:spMkLst>
-            <pc:docMk/>
-            <pc:sldMk cId="1414353441" sldId="646"/>
-            <ac:spMk id="24578" creationId="{16462715-1048-7E21-8905-4168B1C1E2D7}"/>
-          </ac:spMkLst>
-        </pc:spChg>
       </pc:sldChg>
     </pc:docChg>
   </pc:docChgLst>
@@ -9302,7 +8867,7 @@
           <p:nvPr/>
         </p:nvPicPr>
         <p:blipFill>
-          <a:blip r:embed="rId3">
+          <a:blip r:embed="rId3" cstate="print">
             <a:extLst>
               <a:ext uri="{28A0092B-C50C-407E-A947-70E740481C1C}">
                 <a14:useLocalDpi xmlns:a14="http://schemas.microsoft.com/office/drawing/2010/main" val="0"/>
@@ -9337,7 +8902,7 @@
           <p:nvPr/>
         </p:nvPicPr>
         <p:blipFill>
-          <a:blip r:embed="rId3">
+          <a:blip r:embed="rId3" cstate="print">
             <a:extLst>
               <a:ext uri="{28A0092B-C50C-407E-A947-70E740481C1C}">
                 <a14:useLocalDpi xmlns:a14="http://schemas.microsoft.com/office/drawing/2010/main" val="0"/>
@@ -9372,7 +8937,7 @@
           <p:nvPr/>
         </p:nvPicPr>
         <p:blipFill>
-          <a:blip r:embed="rId3">
+          <a:blip r:embed="rId3" cstate="print">
             <a:extLst>
               <a:ext uri="{28A0092B-C50C-407E-A947-70E740481C1C}">
                 <a14:useLocalDpi xmlns:a14="http://schemas.microsoft.com/office/drawing/2010/main" val="0"/>
@@ -9407,7 +8972,7 @@
           <p:nvPr/>
         </p:nvPicPr>
         <p:blipFill>
-          <a:blip r:embed="rId3">
+          <a:blip r:embed="rId3" cstate="print">
             <a:extLst>
               <a:ext uri="{28A0092B-C50C-407E-A947-70E740481C1C}">
                 <a14:useLocalDpi xmlns:a14="http://schemas.microsoft.com/office/drawing/2010/main" val="0"/>
@@ -9442,7 +9007,7 @@
           <p:nvPr/>
         </p:nvPicPr>
         <p:blipFill>
-          <a:blip r:embed="rId3">
+          <a:blip r:embed="rId3" cstate="print">
             <a:extLst>
               <a:ext uri="{28A0092B-C50C-407E-A947-70E740481C1C}">
                 <a14:useLocalDpi xmlns:a14="http://schemas.microsoft.com/office/drawing/2010/main" val="0"/>
@@ -9477,7 +9042,7 @@
           <p:nvPr/>
         </p:nvPicPr>
         <p:blipFill>
-          <a:blip r:embed="rId3">
+          <a:blip r:embed="rId3" cstate="print">
             <a:extLst>
               <a:ext uri="{28A0092B-C50C-407E-A947-70E740481C1C}">
                 <a14:useLocalDpi xmlns:a14="http://schemas.microsoft.com/office/drawing/2010/main" val="0"/>
@@ -9512,7 +9077,7 @@
           <p:nvPr/>
         </p:nvPicPr>
         <p:blipFill>
-          <a:blip r:embed="rId3">
+          <a:blip r:embed="rId3" cstate="print">
             <a:extLst>
               <a:ext uri="{28A0092B-C50C-407E-A947-70E740481C1C}">
                 <a14:useLocalDpi xmlns:a14="http://schemas.microsoft.com/office/drawing/2010/main" val="0"/>
@@ -9547,7 +9112,7 @@
           <p:nvPr/>
         </p:nvPicPr>
         <p:blipFill>
-          <a:blip r:embed="rId3">
+          <a:blip r:embed="rId3" cstate="print">
             <a:extLst>
               <a:ext uri="{28A0092B-C50C-407E-A947-70E740481C1C}">
                 <a14:useLocalDpi xmlns:a14="http://schemas.microsoft.com/office/drawing/2010/main" val="0"/>
@@ -28151,7 +27716,7 @@
               </a:tabLst>
             </a:pPr>
             <a:r>
-              <a:rPr lang="en-US" sz="2000" b="1">
+              <a:rPr lang="en-US" sz="2000" b="1" dirty="0">
                 <a:solidFill>
                   <a:srgbClr val="0000FF"/>
                 </a:solidFill>
@@ -28161,14 +27726,14 @@
               <a:t>for</a:t>
             </a:r>
             <a:r>
-              <a:rPr lang="en-US" sz="2000" b="1">
+              <a:rPr lang="en-US" sz="2000" b="1" dirty="0">
                 <a:latin typeface="Courier New" panose="02070309020205020404" pitchFamily="49" charset="0"/>
                 <a:cs typeface="Courier New" panose="02070309020205020404" pitchFamily="49" charset="0"/>
               </a:rPr>
               <a:t> (</a:t>
             </a:r>
             <a:r>
-              <a:rPr lang="en-US" sz="2000" b="1">
+              <a:rPr lang="en-US" sz="2000" b="1" dirty="0">
                 <a:solidFill>
                   <a:srgbClr val="0000FF"/>
                 </a:solidFill>
@@ -28178,28 +27743,28 @@
               <a:t>long</a:t>
             </a:r>
             <a:r>
-              <a:rPr lang="en-US" sz="2000" b="1">
+              <a:rPr lang="en-US" sz="2000" b="1" dirty="0">
                 <a:latin typeface="Courier New" panose="02070309020205020404" pitchFamily="49" charset="0"/>
                 <a:cs typeface="Courier New" panose="02070309020205020404" pitchFamily="49" charset="0"/>
               </a:rPr>
               <a:t> </a:t>
             </a:r>
             <a:r>
-              <a:rPr lang="en-US" sz="2000" b="1" err="1">
+              <a:rPr lang="en-US" sz="2000" b="1" dirty="0" err="1">
                 <a:latin typeface="Courier New" panose="02070309020205020404" pitchFamily="49" charset="0"/>
                 <a:cs typeface="Courier New" panose="02070309020205020404" pitchFamily="49" charset="0"/>
               </a:rPr>
               <a:t>i</a:t>
             </a:r>
             <a:r>
-              <a:rPr lang="en-US" sz="2000" b="1">
+              <a:rPr lang="en-US" sz="2000" b="1" dirty="0">
                 <a:latin typeface="Courier New" panose="02070309020205020404" pitchFamily="49" charset="0"/>
                 <a:cs typeface="Courier New" panose="02070309020205020404" pitchFamily="49" charset="0"/>
               </a:rPr>
               <a:t> = </a:t>
             </a:r>
             <a:r>
-              <a:rPr lang="en-US" sz="2000" b="1">
+              <a:rPr lang="en-US" sz="2000" b="1" dirty="0">
                 <a:solidFill>
                   <a:srgbClr val="C00000"/>
                 </a:solidFill>
@@ -28209,28 +27774,28 @@
               <a:t>0</a:t>
             </a:r>
             <a:r>
-              <a:rPr lang="en-US" sz="2000" b="1">
+              <a:rPr lang="en-US" sz="2000" b="1" dirty="0">
                 <a:latin typeface="Courier New" panose="02070309020205020404" pitchFamily="49" charset="0"/>
                 <a:cs typeface="Courier New" panose="02070309020205020404" pitchFamily="49" charset="0"/>
               </a:rPr>
               <a:t>; </a:t>
             </a:r>
             <a:r>
-              <a:rPr lang="en-US" sz="2000" b="1" err="1">
+              <a:rPr lang="en-US" sz="2000" b="1" dirty="0" err="1">
                 <a:latin typeface="Courier New" panose="02070309020205020404" pitchFamily="49" charset="0"/>
                 <a:cs typeface="Courier New" panose="02070309020205020404" pitchFamily="49" charset="0"/>
               </a:rPr>
               <a:t>i</a:t>
             </a:r>
             <a:r>
-              <a:rPr lang="en-US" sz="2000" b="1">
-                <a:latin typeface="Courier New" panose="02070309020205020404" pitchFamily="49" charset="0"/>
-                <a:cs typeface="Courier New" panose="02070309020205020404" pitchFamily="49" charset="0"/>
-              </a:rPr>
-              <a:t> &lt;= </a:t>
-            </a:r>
-            <a:r>
-              <a:rPr lang="en-US" sz="2000" b="1">
+              <a:rPr lang="en-US" sz="2000" b="1" dirty="0">
+                <a:latin typeface="Courier New" panose="02070309020205020404" pitchFamily="49" charset="0"/>
+                <a:cs typeface="Courier New" panose="02070309020205020404" pitchFamily="49" charset="0"/>
+              </a:rPr>
+              <a:t> &lt; </a:t>
+            </a:r>
+            <a:r>
+              <a:rPr lang="en-US" sz="2000" b="1" dirty="0">
                 <a:solidFill>
                   <a:srgbClr val="C00000"/>
                 </a:solidFill>
@@ -28240,28 +27805,28 @@
               <a:t>4</a:t>
             </a:r>
             <a:r>
-              <a:rPr lang="en-US" sz="2000" b="1">
+              <a:rPr lang="en-US" sz="2000" b="1" dirty="0">
                 <a:latin typeface="Courier New" panose="02070309020205020404" pitchFamily="49" charset="0"/>
                 <a:cs typeface="Courier New" panose="02070309020205020404" pitchFamily="49" charset="0"/>
               </a:rPr>
               <a:t>; </a:t>
             </a:r>
             <a:r>
-              <a:rPr lang="en-US" sz="2000" b="1" err="1">
+              <a:rPr lang="en-US" sz="2000" b="1" dirty="0" err="1">
                 <a:latin typeface="Courier New" panose="02070309020205020404" pitchFamily="49" charset="0"/>
                 <a:cs typeface="Courier New" panose="02070309020205020404" pitchFamily="49" charset="0"/>
               </a:rPr>
               <a:t>i</a:t>
             </a:r>
             <a:r>
-              <a:rPr lang="en-US" sz="2000" b="1">
+              <a:rPr lang="en-US" sz="2000" b="1" dirty="0">
                 <a:latin typeface="Courier New" panose="02070309020205020404" pitchFamily="49" charset="0"/>
                 <a:cs typeface="Courier New" panose="02070309020205020404" pitchFamily="49" charset="0"/>
               </a:rPr>
               <a:t> += </a:t>
             </a:r>
             <a:r>
-              <a:rPr lang="en-US" sz="2000" b="1">
+              <a:rPr lang="en-US" sz="2000" b="1" dirty="0">
                 <a:solidFill>
                   <a:srgbClr val="C00000"/>
                 </a:solidFill>
@@ -28271,7 +27836,7 @@
               <a:t>1</a:t>
             </a:r>
             <a:r>
-              <a:rPr lang="en-US" sz="2000" b="1">
+              <a:rPr lang="en-US" sz="2000" b="1" dirty="0">
                 <a:latin typeface="Courier New" panose="02070309020205020404" pitchFamily="49" charset="0"/>
                 <a:cs typeface="Courier New" panose="02070309020205020404" pitchFamily="49" charset="0"/>
               </a:rPr>
@@ -28286,7 +27851,7 @@
               </a:tabLst>
             </a:pPr>
             <a:r>
-              <a:rPr lang="en-US" sz="2000" b="1">
+              <a:rPr lang="en-US" sz="2000" b="1" dirty="0">
                 <a:latin typeface="Courier New" panose="02070309020205020404" pitchFamily="49" charset="0"/>
                 <a:cs typeface="Courier New" panose="02070309020205020404" pitchFamily="49" charset="0"/>
               </a:rPr>
@@ -28301,35 +27866,35 @@
               </a:tabLst>
             </a:pPr>
             <a:r>
-              <a:rPr lang="en-US" sz="2000" b="1">
+              <a:rPr lang="en-US" sz="2000" b="1" dirty="0">
                 <a:latin typeface="Courier New" panose="02070309020205020404" pitchFamily="49" charset="0"/>
                 <a:cs typeface="Courier New" panose="02070309020205020404" pitchFamily="49" charset="0"/>
               </a:rPr>
               <a:t>  b[</a:t>
             </a:r>
             <a:r>
-              <a:rPr lang="en-US" sz="2000" b="1" err="1">
+              <a:rPr lang="en-US" sz="2000" b="1" dirty="0" err="1">
                 <a:latin typeface="Courier New" panose="02070309020205020404" pitchFamily="49" charset="0"/>
                 <a:cs typeface="Courier New" panose="02070309020205020404" pitchFamily="49" charset="0"/>
               </a:rPr>
               <a:t>i</a:t>
             </a:r>
             <a:r>
-              <a:rPr lang="en-US" sz="2000" b="1">
+              <a:rPr lang="en-US" sz="2000" b="1" dirty="0">
                 <a:latin typeface="Courier New" panose="02070309020205020404" pitchFamily="49" charset="0"/>
                 <a:cs typeface="Courier New" panose="02070309020205020404" pitchFamily="49" charset="0"/>
               </a:rPr>
               <a:t>] = a[</a:t>
             </a:r>
             <a:r>
-              <a:rPr lang="en-US" sz="2000" b="1" err="1">
+              <a:rPr lang="en-US" sz="2000" b="1" dirty="0" err="1">
                 <a:latin typeface="Courier New" panose="02070309020205020404" pitchFamily="49" charset="0"/>
                 <a:cs typeface="Courier New" panose="02070309020205020404" pitchFamily="49" charset="0"/>
               </a:rPr>
               <a:t>i</a:t>
             </a:r>
             <a:r>
-              <a:rPr lang="en-US" sz="2000" b="1">
+              <a:rPr lang="en-US" sz="2000" b="1" dirty="0">
                 <a:latin typeface="Courier New" panose="02070309020205020404" pitchFamily="49" charset="0"/>
                 <a:cs typeface="Courier New" panose="02070309020205020404" pitchFamily="49" charset="0"/>
               </a:rPr>
@@ -28344,7 +27909,7 @@
               </a:tabLst>
             </a:pPr>
             <a:r>
-              <a:rPr lang="en-US" sz="2000" b="1">
+              <a:rPr lang="en-US" sz="2000" b="1" dirty="0">
                 <a:latin typeface="Courier New" panose="02070309020205020404" pitchFamily="49" charset="0"/>
                 <a:cs typeface="Courier New" panose="02070309020205020404" pitchFamily="49" charset="0"/>
               </a:rPr>
@@ -32690,6 +32255,33 @@
                                   </p:childTnLst>
                                 </p:cTn>
                               </p:par>
+                              <p:par>
+                                <p:cTn id="26" presetID="1" presetClass="entr" presetSubtype="0" fill="hold" grpId="0" nodeType="withEffect">
+                                  <p:stCondLst>
+                                    <p:cond delay="0"/>
+                                  </p:stCondLst>
+                                  <p:childTnLst>
+                                    <p:set>
+                                      <p:cBhvr>
+                                        <p:cTn id="27" dur="1" fill="hold">
+                                          <p:stCondLst>
+                                            <p:cond delay="0"/>
+                                          </p:stCondLst>
+                                        </p:cTn>
+                                        <p:tgtEl>
+                                          <p:spTgt spid="9"/>
+                                        </p:tgtEl>
+                                        <p:attrNameLst>
+                                          <p:attrName>style.visibility</p:attrName>
+                                        </p:attrNameLst>
+                                      </p:cBhvr>
+                                      <p:to>
+                                        <p:strVal val="visible"/>
+                                      </p:to>
+                                    </p:set>
+                                  </p:childTnLst>
+                                </p:cTn>
+                              </p:par>
                             </p:childTnLst>
                           </p:cTn>
                         </p:par>
@@ -32720,6 +32312,7 @@
     <p:bldLst>
       <p:bldP spid="39" grpId="0" animBg="1"/>
       <p:bldP spid="40" grpId="0" animBg="1"/>
+      <p:bldP spid="9" grpId="0"/>
     </p:bldLst>
   </p:timing>
 </p:sld>
@@ -43616,7 +43209,7 @@
             </a:pPr>
             <a:r>
               <a:rPr lang="en-US" sz="2800" dirty="0"/>
-              <a:t>Exercise 2</a:t>
+              <a:t>Exercises</a:t>
             </a:r>
           </a:p>
           <a:p>
@@ -43636,7 +43229,7 @@
             </a:pPr>
             <a:r>
               <a:rPr lang="en-US" sz="2000" dirty="0"/>
-              <a:t>due on </a:t>
+              <a:t>Exercise 2 due </a:t>
             </a:r>
             <a:r>
               <a:rPr lang="en-US" sz="2000" dirty="0">
@@ -43645,6 +43238,47 @@
                 </a:solidFill>
               </a:rPr>
               <a:t>3</a:t>
+            </a:r>
+            <a:r>
+              <a:rPr lang="en-US" sz="2000" dirty="0"/>
+              <a:t> </a:t>
+            </a:r>
+            <a:r>
+              <a:rPr lang="en-US" sz="2000" dirty="0">
+                <a:solidFill>
+                  <a:srgbClr val="0000FF"/>
+                </a:solidFill>
+              </a:rPr>
+              <a:t>Mar, 2pm</a:t>
+            </a:r>
+            <a:endParaRPr lang="en-US" sz="2000" dirty="0"/>
+          </a:p>
+          <a:p>
+            <a:pPr marL="800100" lvl="1" indent="-342900">
+              <a:spcBef>
+                <a:spcPts val="1200"/>
+              </a:spcBef>
+              <a:buClr>
+                <a:schemeClr val="accent4">
+                  <a:lumMod val="60000"/>
+                  <a:lumOff val="40000"/>
+                </a:schemeClr>
+              </a:buClr>
+              <a:buSzPct val="75000"/>
+              <a:buFont typeface="Wingdings" pitchFamily="2" charset="2"/>
+              <a:buChar char="n"/>
+            </a:pPr>
+            <a:r>
+              <a:rPr lang="en-US" sz="2000" dirty="0"/>
+              <a:t>Exercise 3 due </a:t>
+            </a:r>
+            <a:r>
+              <a:rPr lang="en-US" sz="2000" dirty="0">
+                <a:solidFill>
+                  <a:srgbClr val="0000FF"/>
+                </a:solidFill>
+              </a:rPr>
+              <a:t>10</a:t>
             </a:r>
             <a:r>
               <a:rPr lang="en-US" sz="2000" dirty="0"/>
@@ -46519,7 +46153,7 @@
             </a:pPr>
             <a:r>
               <a:rPr lang="en-US" dirty="0"/>
-              <a:t>Some space (4 bytes) is allocated for variable x in the frame</a:t>
+              <a:t>Some space (8 bytes) is allocated for variable x in the frame</a:t>
             </a:r>
           </a:p>
           <a:p>
@@ -46561,7 +46195,7 @@
             </a:pPr>
             <a:r>
               <a:rPr lang="en-US" dirty="0"/>
-              <a:t>Some space (4 bytes) is allocated for variable y in the frame.</a:t>
+              <a:t>Some space (8 bytes) is allocated for variable y in the frame.</a:t>
             </a:r>
           </a:p>
           <a:p>
@@ -47164,7 +46798,7 @@
           <p:nvPr/>
         </p:nvPicPr>
         <p:blipFill>
-          <a:blip r:embed="rId4">
+          <a:blip r:embed="rId4" cstate="print">
             <a:extLst>
               <a:ext uri="{28A0092B-C50C-407E-A947-70E740481C1C}">
                 <a14:useLocalDpi xmlns:a14="http://schemas.microsoft.com/office/drawing/2010/main" val="0"/>
@@ -48779,7 +48413,7 @@
           <p:nvPr/>
         </p:nvPicPr>
         <p:blipFill>
-          <a:blip r:embed="rId4">
+          <a:blip r:embed="rId4" cstate="print">
             <a:extLst>
               <a:ext uri="{28A0092B-C50C-407E-A947-70E740481C1C}">
                 <a14:useLocalDpi xmlns:a14="http://schemas.microsoft.com/office/drawing/2010/main" val="0"/>
@@ -48814,7 +48448,7 @@
           <p:nvPr/>
         </p:nvPicPr>
         <p:blipFill>
-          <a:blip r:embed="rId5">
+          <a:blip r:embed="rId5" cstate="print">
             <a:extLst>
               <a:ext uri="{28A0092B-C50C-407E-A947-70E740481C1C}">
                 <a14:useLocalDpi xmlns:a14="http://schemas.microsoft.com/office/drawing/2010/main" val="0"/>
@@ -49807,7 +49441,27 @@
                 <a:latin typeface="Courier New" panose="02070309020205020404" pitchFamily="49" charset="0"/>
                 <a:cs typeface="Courier New" panose="02070309020205020404" pitchFamily="49" charset="0"/>
               </a:rPr>
-              <a:t> main()</a:t>
+              <a:t> main(</a:t>
+            </a:r>
+            <a:r>
+              <a:rPr lang="en-US" b="1" dirty="0">
+                <a:solidFill>
+                  <a:srgbClr val="0000FF"/>
+                </a:solidFill>
+                <a:latin typeface="Courier New" panose="02070309020205020404" pitchFamily="49" charset="0"/>
+                <a:cs typeface="Courier New" panose="02070309020205020404" pitchFamily="49" charset="0"/>
+              </a:rPr>
+              <a:t>void</a:t>
+            </a:r>
+            <a:r>
+              <a:rPr lang="en-US" b="1" dirty="0">
+                <a:solidFill>
+                  <a:schemeClr val="tx1"/>
+                </a:solidFill>
+                <a:latin typeface="Courier New" panose="02070309020205020404" pitchFamily="49" charset="0"/>
+                <a:cs typeface="Courier New" panose="02070309020205020404" pitchFamily="49" charset="0"/>
+              </a:rPr>
+              <a:t>)</a:t>
             </a:r>
           </a:p>
           <a:p>
@@ -50153,7 +49807,7 @@
           <p:nvPr/>
         </p:nvPicPr>
         <p:blipFill>
-          <a:blip r:embed="rId4">
+          <a:blip r:embed="rId4" cstate="print">
             <a:extLst>
               <a:ext uri="{28A0092B-C50C-407E-A947-70E740481C1C}">
                 <a14:useLocalDpi xmlns:a14="http://schemas.microsoft.com/office/drawing/2010/main" val="0"/>
@@ -51104,7 +50758,7 @@
           <p:nvPr/>
         </p:nvPicPr>
         <p:blipFill>
-          <a:blip r:embed="rId4">
+          <a:blip r:embed="rId4" cstate="print">
             <a:extLst>
               <a:ext uri="{28A0092B-C50C-407E-A947-70E740481C1C}">
                 <a14:useLocalDpi xmlns:a14="http://schemas.microsoft.com/office/drawing/2010/main" val="0"/>
@@ -52095,7 +51749,7 @@
           <p:nvPr/>
         </p:nvPicPr>
         <p:blipFill>
-          <a:blip r:embed="rId4">
+          <a:blip r:embed="rId4" cstate="print">
             <a:extLst>
               <a:ext uri="{28A0092B-C50C-407E-A947-70E740481C1C}">
                 <a14:useLocalDpi xmlns:a14="http://schemas.microsoft.com/office/drawing/2010/main" val="0"/>
